--- a/nepesseg2025.pptx
+++ b/nepesseg2025.pptx
@@ -111,6 +111,11 @@
       </a:defRPr>
     </a:lvl9pPr>
   </p:defaultTextStyle>
+  <p:extLst>
+    <p:ext uri="{EFAFB233-063F-42B5-8137-9DF3F51BA10A}">
+      <p15:sldGuideLst xmlns:p15="http://schemas.microsoft.com/office/powerpoint/2012/main"/>
+    </p:ext>
+  </p:extLst>
 </p:presentation>
 </file>
 
@@ -263,7 +268,7 @@
           <a:p>
             <a:fld id="{290DD53F-61ED-4838-930B-9396BCAAC851}" type="datetimeFigureOut">
               <a:rPr lang="hu-HU" smtClean="0"/>
-              <a:t>2026. 09. 17.</a:t>
+              <a:t>2026. 09. 18.</a:t>
             </a:fld>
             <a:endParaRPr lang="hu-HU"/>
           </a:p>
@@ -466,7 +471,7 @@
           <a:p>
             <a:fld id="{290DD53F-61ED-4838-930B-9396BCAAC851}" type="datetimeFigureOut">
               <a:rPr lang="hu-HU" smtClean="0"/>
-              <a:t>2026. 09. 17.</a:t>
+              <a:t>2026. 09. 18.</a:t>
             </a:fld>
             <a:endParaRPr lang="hu-HU"/>
           </a:p>
@@ -679,7 +684,7 @@
           <a:p>
             <a:fld id="{290DD53F-61ED-4838-930B-9396BCAAC851}" type="datetimeFigureOut">
               <a:rPr lang="hu-HU" smtClean="0"/>
-              <a:t>2026. 09. 17.</a:t>
+              <a:t>2026. 09. 18.</a:t>
             </a:fld>
             <a:endParaRPr lang="hu-HU"/>
           </a:p>
@@ -882,7 +887,7 @@
           <a:p>
             <a:fld id="{290DD53F-61ED-4838-930B-9396BCAAC851}" type="datetimeFigureOut">
               <a:rPr lang="hu-HU" smtClean="0"/>
-              <a:t>2026. 09. 17.</a:t>
+              <a:t>2026. 09. 18.</a:t>
             </a:fld>
             <a:endParaRPr lang="hu-HU"/>
           </a:p>
@@ -1161,7 +1166,7 @@
           <a:p>
             <a:fld id="{290DD53F-61ED-4838-930B-9396BCAAC851}" type="datetimeFigureOut">
               <a:rPr lang="hu-HU" smtClean="0"/>
-              <a:t>2026. 09. 17.</a:t>
+              <a:t>2026. 09. 18.</a:t>
             </a:fld>
             <a:endParaRPr lang="hu-HU"/>
           </a:p>
@@ -1432,7 +1437,7 @@
           <a:p>
             <a:fld id="{290DD53F-61ED-4838-930B-9396BCAAC851}" type="datetimeFigureOut">
               <a:rPr lang="hu-HU" smtClean="0"/>
-              <a:t>2026. 09. 17.</a:t>
+              <a:t>2026. 09. 18.</a:t>
             </a:fld>
             <a:endParaRPr lang="hu-HU"/>
           </a:p>
@@ -1850,7 +1855,7 @@
           <a:p>
             <a:fld id="{290DD53F-61ED-4838-930B-9396BCAAC851}" type="datetimeFigureOut">
               <a:rPr lang="hu-HU" smtClean="0"/>
-              <a:t>2026. 09. 17.</a:t>
+              <a:t>2026. 09. 18.</a:t>
             </a:fld>
             <a:endParaRPr lang="hu-HU"/>
           </a:p>
@@ -1995,7 +2000,7 @@
           <a:p>
             <a:fld id="{290DD53F-61ED-4838-930B-9396BCAAC851}" type="datetimeFigureOut">
               <a:rPr lang="hu-HU" smtClean="0"/>
-              <a:t>2026. 09. 17.</a:t>
+              <a:t>2026. 09. 18.</a:t>
             </a:fld>
             <a:endParaRPr lang="hu-HU"/>
           </a:p>
@@ -2111,7 +2116,7 @@
           <a:p>
             <a:fld id="{290DD53F-61ED-4838-930B-9396BCAAC851}" type="datetimeFigureOut">
               <a:rPr lang="hu-HU" smtClean="0"/>
-              <a:t>2026. 09. 17.</a:t>
+              <a:t>2026. 09. 18.</a:t>
             </a:fld>
             <a:endParaRPr lang="hu-HU"/>
           </a:p>
@@ -2427,7 +2432,7 @@
           <a:p>
             <a:fld id="{290DD53F-61ED-4838-930B-9396BCAAC851}" type="datetimeFigureOut">
               <a:rPr lang="hu-HU" smtClean="0"/>
-              <a:t>2026. 09. 17.</a:t>
+              <a:t>2026. 09. 18.</a:t>
             </a:fld>
             <a:endParaRPr lang="hu-HU"/>
           </a:p>
@@ -2719,7 +2724,7 @@
           <a:p>
             <a:fld id="{290DD53F-61ED-4838-930B-9396BCAAC851}" type="datetimeFigureOut">
               <a:rPr lang="hu-HU" smtClean="0"/>
-              <a:t>2026. 09. 17.</a:t>
+              <a:t>2026. 09. 18.</a:t>
             </a:fld>
             <a:endParaRPr lang="hu-HU"/>
           </a:p>
@@ -2803,6 +2808,17 @@
         <a:blipFill dpi="0" rotWithShape="1">
           <a:blip r:embed="rId13">
             <a:lum/>
+            <a:extLst>
+              <a:ext uri="{BEBA8EAE-BF5A-486C-A8C5-ECC9F3942E4B}">
+                <a14:imgProps xmlns:a14="http://schemas.microsoft.com/office/drawing/2010/main">
+                  <a14:imgLayer r:embed="rId14">
+                    <a14:imgEffect>
+                      <a14:colorTemperature colorTemp="3000"/>
+                    </a14:imgEffect>
+                  </a14:imgLayer>
+                </a14:imgProps>
+              </a:ext>
+            </a:extLst>
           </a:blip>
           <a:srcRect/>
           <a:stretch>
@@ -2974,7 +2990,7 @@
           <a:p>
             <a:fld id="{290DD53F-61ED-4838-930B-9396BCAAC851}" type="datetimeFigureOut">
               <a:rPr lang="hu-HU" smtClean="0"/>
-              <a:t>2026. 09. 17.</a:t>
+              <a:t>2026. 09. 18.</a:t>
             </a:fld>
             <a:endParaRPr lang="hu-HU"/>
           </a:p>
@@ -3380,20 +3396,6 @@
 <file path=ppt/slides/slide1.xml><?xml version="1.0" encoding="utf-8"?>
 <p:sld xmlns:a="http://schemas.openxmlformats.org/drawingml/2006/main" xmlns:r="http://schemas.openxmlformats.org/officeDocument/2006/relationships" xmlns:p="http://schemas.openxmlformats.org/presentationml/2006/main" showMasterSp="0">
   <p:cSld>
-    <p:bg>
-      <p:bgPr>
-        <a:blipFill dpi="0" rotWithShape="1">
-          <a:blip r:embed="rId2">
-            <a:lum/>
-          </a:blip>
-          <a:srcRect/>
-          <a:stretch>
-            <a:fillRect/>
-          </a:stretch>
-        </a:blipFill>
-        <a:effectLst/>
-      </p:bgPr>
-    </p:bg>
     <p:spTree>
       <p:nvGrpSpPr>
         <p:cNvPr id="1" name=""/>
@@ -3673,6 +3675,20 @@
           <a:prstGeom prst="rect">
             <a:avLst/>
           </a:prstGeom>
+          <a:ln w="38100" cap="sq">
+            <a:solidFill>
+              <a:schemeClr val="bg1"/>
+            </a:solidFill>
+            <a:prstDash val="solid"/>
+            <a:miter lim="800000"/>
+          </a:ln>
+          <a:effectLst>
+            <a:outerShdw blurRad="50800" dist="38100" dir="2700000" algn="tl" rotWithShape="0">
+              <a:srgbClr val="000000">
+                <a:alpha val="43000"/>
+              </a:srgbClr>
+            </a:outerShdw>
+          </a:effectLst>
         </p:spPr>
       </p:pic>
     </p:spTree>
@@ -4441,6 +4457,117 @@
           <a:prstGeom prst="rect">
             <a:avLst/>
           </a:prstGeom>
+          <a:ln w="19050" cap="rnd">
+            <a:solidFill>
+              <a:schemeClr val="bg1"/>
+            </a:solidFill>
+            <a:prstDash val="dash"/>
+            <a:bevel/>
+            <a:extLst>
+              <a:ext uri="{C807C97D-BFC1-408E-A445-0C87EB9F89A2}">
+                <ask:lineSketchStyleProps xmlns:ask="http://schemas.microsoft.com/office/drawing/2018/sketchyshapes" sd="1219033472">
+                  <a:custGeom>
+                    <a:avLst/>
+                    <a:gdLst>
+                      <a:gd name="connsiteX0" fmla="*/ 0 w 5427135"/>
+                      <a:gd name="connsiteY0" fmla="*/ 0 h 782425"/>
+                      <a:gd name="connsiteX1" fmla="*/ 5427135 w 5427135"/>
+                      <a:gd name="connsiteY1" fmla="*/ 0 h 782425"/>
+                      <a:gd name="connsiteX2" fmla="*/ 5427135 w 5427135"/>
+                      <a:gd name="connsiteY2" fmla="*/ 782425 h 782425"/>
+                      <a:gd name="connsiteX3" fmla="*/ 0 w 5427135"/>
+                      <a:gd name="connsiteY3" fmla="*/ 782425 h 782425"/>
+                      <a:gd name="connsiteX4" fmla="*/ 0 w 5427135"/>
+                      <a:gd name="connsiteY4" fmla="*/ 0 h 782425"/>
+                    </a:gdLst>
+                    <a:ahLst/>
+                    <a:cxnLst>
+                      <a:cxn ang="0">
+                        <a:pos x="connsiteX0" y="connsiteY0"/>
+                      </a:cxn>
+                      <a:cxn ang="0">
+                        <a:pos x="connsiteX1" y="connsiteY1"/>
+                      </a:cxn>
+                      <a:cxn ang="0">
+                        <a:pos x="connsiteX2" y="connsiteY2"/>
+                      </a:cxn>
+                      <a:cxn ang="0">
+                        <a:pos x="connsiteX3" y="connsiteY3"/>
+                      </a:cxn>
+                      <a:cxn ang="0">
+                        <a:pos x="connsiteX4" y="connsiteY4"/>
+                      </a:cxn>
+                    </a:cxnLst>
+                    <a:rect l="l" t="t" r="r" b="b"/>
+                    <a:pathLst>
+                      <a:path w="5427135" h="782425" fill="none" extrusionOk="0">
+                        <a:moveTo>
+                          <a:pt x="0" y="0"/>
+                        </a:moveTo>
+                        <a:cubicBezTo>
+                          <a:pt x="2316607" y="-49533"/>
+                          <a:pt x="2999781" y="-14809"/>
+                          <a:pt x="5427135" y="0"/>
+                        </a:cubicBezTo>
+                        <a:cubicBezTo>
+                          <a:pt x="5454258" y="332298"/>
+                          <a:pt x="5438789" y="624240"/>
+                          <a:pt x="5427135" y="782425"/>
+                        </a:cubicBezTo>
+                        <a:cubicBezTo>
+                          <a:pt x="3474628" y="734194"/>
+                          <a:pt x="729648" y="866880"/>
+                          <a:pt x="0" y="782425"/>
+                        </a:cubicBezTo>
+                        <a:cubicBezTo>
+                          <a:pt x="47936" y="499700"/>
+                          <a:pt x="34071" y="307652"/>
+                          <a:pt x="0" y="0"/>
+                        </a:cubicBezTo>
+                        <a:close/>
+                      </a:path>
+                      <a:path w="5427135" h="782425" stroke="0" extrusionOk="0">
+                        <a:moveTo>
+                          <a:pt x="0" y="0"/>
+                        </a:moveTo>
+                        <a:cubicBezTo>
+                          <a:pt x="1628747" y="118645"/>
+                          <a:pt x="3230500" y="116012"/>
+                          <a:pt x="5427135" y="0"/>
+                        </a:cubicBezTo>
+                        <a:cubicBezTo>
+                          <a:pt x="5471899" y="125859"/>
+                          <a:pt x="5452845" y="500339"/>
+                          <a:pt x="5427135" y="782425"/>
+                        </a:cubicBezTo>
+                        <a:cubicBezTo>
+                          <a:pt x="4835298" y="917025"/>
+                          <a:pt x="799512" y="625229"/>
+                          <a:pt x="0" y="782425"/>
+                        </a:cubicBezTo>
+                        <a:cubicBezTo>
+                          <a:pt x="56657" y="619159"/>
+                          <a:pt x="-39196" y="226081"/>
+                          <a:pt x="0" y="0"/>
+                        </a:cubicBezTo>
+                        <a:close/>
+                      </a:path>
+                    </a:pathLst>
+                  </a:custGeom>
+                  <ask:type>
+                    <ask:lineSketchNone/>
+                  </ask:type>
+                </ask:lineSketchStyleProps>
+              </a:ext>
+            </a:extLst>
+          </a:ln>
+          <a:effectLst>
+            <a:outerShdw blurRad="50800" dist="38100" dir="2700000" algn="tl" rotWithShape="0">
+              <a:srgbClr val="000000">
+                <a:alpha val="43000"/>
+              </a:srgbClr>
+            </a:outerShdw>
+          </a:effectLst>
         </p:spPr>
       </p:pic>
       <p:pic>
@@ -4666,30 +4793,21 @@
                             </p:childTnLst>
                           </p:cTn>
                         </p:par>
-                      </p:childTnLst>
-                    </p:cTn>
-                  </p:par>
-                  <p:par>
-                    <p:cTn id="10" fill="hold">
-                      <p:stCondLst>
-                        <p:cond delay="indefinite"/>
-                      </p:stCondLst>
-                      <p:childTnLst>
                         <p:par>
-                          <p:cTn id="11" fill="hold">
+                          <p:cTn id="10" fill="hold">
                             <p:stCondLst>
-                              <p:cond delay="0"/>
+                              <p:cond delay="1000"/>
                             </p:stCondLst>
                             <p:childTnLst>
                               <p:par>
-                                <p:cTn id="12" presetID="2" presetClass="entr" presetSubtype="8" fill="hold" nodeType="clickEffect">
+                                <p:cTn id="11" presetID="2" presetClass="entr" presetSubtype="8" fill="hold" nodeType="afterEffect">
                                   <p:stCondLst>
                                     <p:cond delay="0"/>
                                   </p:stCondLst>
                                   <p:childTnLst>
                                     <p:set>
                                       <p:cBhvr>
-                                        <p:cTn id="13" dur="1" fill="hold">
+                                        <p:cTn id="12" dur="1" fill="hold">
                                           <p:stCondLst>
                                             <p:cond delay="0"/>
                                           </p:stCondLst>
@@ -4707,7 +4825,7 @@
                                     </p:set>
                                     <p:anim calcmode="lin" valueType="num">
                                       <p:cBhvr additive="base">
-                                        <p:cTn id="14" dur="500" fill="hold"/>
+                                        <p:cTn id="13" dur="500" fill="hold"/>
                                         <p:tgtEl>
                                           <p:spTgt spid="5"/>
                                         </p:tgtEl>
@@ -4730,7 +4848,7 @@
                                     </p:anim>
                                     <p:anim calcmode="lin" valueType="num">
                                       <p:cBhvr additive="base">
-                                        <p:cTn id="15" dur="500" fill="hold"/>
+                                        <p:cTn id="14" dur="500" fill="hold"/>
                                         <p:tgtEl>
                                           <p:spTgt spid="5"/>
                                         </p:tgtEl>
@@ -4761,26 +4879,26 @@
                     </p:cTn>
                   </p:par>
                   <p:par>
-                    <p:cTn id="16" fill="hold">
+                    <p:cTn id="15" fill="hold">
                       <p:stCondLst>
                         <p:cond delay="indefinite"/>
                       </p:stCondLst>
                       <p:childTnLst>
                         <p:par>
-                          <p:cTn id="17" fill="hold">
+                          <p:cTn id="16" fill="hold">
                             <p:stCondLst>
                               <p:cond delay="0"/>
                             </p:stCondLst>
                             <p:childTnLst>
                               <p:par>
-                                <p:cTn id="18" presetID="2" presetClass="entr" presetSubtype="8" fill="hold" nodeType="clickEffect">
+                                <p:cTn id="17" presetID="2" presetClass="entr" presetSubtype="8" fill="hold" nodeType="clickEffect">
                                   <p:stCondLst>
                                     <p:cond delay="0"/>
                                   </p:stCondLst>
                                   <p:childTnLst>
                                     <p:set>
                                       <p:cBhvr>
-                                        <p:cTn id="19" dur="1" fill="hold">
+                                        <p:cTn id="18" dur="1" fill="hold">
                                           <p:stCondLst>
                                             <p:cond delay="0"/>
                                           </p:stCondLst>
@@ -4802,7 +4920,7 @@
                                     </p:set>
                                     <p:anim calcmode="lin" valueType="num">
                                       <p:cBhvr additive="base">
-                                        <p:cTn id="20" dur="500" fill="hold"/>
+                                        <p:cTn id="19" dur="500" fill="hold"/>
                                         <p:tgtEl>
                                           <p:spTgt spid="3">
                                             <p:txEl>
@@ -4829,7 +4947,7 @@
                                     </p:anim>
                                     <p:anim calcmode="lin" valueType="num">
                                       <p:cBhvr additive="base">
-                                        <p:cTn id="21" dur="500" fill="hold"/>
+                                        <p:cTn id="20" dur="500" fill="hold"/>
                                         <p:tgtEl>
                                           <p:spTgt spid="3">
                                             <p:txEl>
@@ -4860,30 +4978,21 @@
                             </p:childTnLst>
                           </p:cTn>
                         </p:par>
-                      </p:childTnLst>
-                    </p:cTn>
-                  </p:par>
-                  <p:par>
-                    <p:cTn id="22" fill="hold">
-                      <p:stCondLst>
-                        <p:cond delay="indefinite"/>
-                      </p:stCondLst>
-                      <p:childTnLst>
                         <p:par>
-                          <p:cTn id="23" fill="hold">
+                          <p:cTn id="21" fill="hold">
                             <p:stCondLst>
-                              <p:cond delay="0"/>
+                              <p:cond delay="500"/>
                             </p:stCondLst>
                             <p:childTnLst>
                               <p:par>
-                                <p:cTn id="24" presetID="16" presetClass="entr" presetSubtype="21" fill="hold" nodeType="clickEffect">
+                                <p:cTn id="22" presetID="16" presetClass="entr" presetSubtype="21" fill="hold" nodeType="afterEffect">
                                   <p:stCondLst>
                                     <p:cond delay="0"/>
                                   </p:stCondLst>
                                   <p:childTnLst>
                                     <p:set>
                                       <p:cBhvr>
-                                        <p:cTn id="25" dur="1" fill="hold">
+                                        <p:cTn id="23" dur="1" fill="hold">
                                           <p:stCondLst>
                                             <p:cond delay="0"/>
                                           </p:stCondLst>
@@ -4901,7 +5010,7 @@
                                     </p:set>
                                     <p:animEffect transition="in" filter="barn(inVertical)">
                                       <p:cBhvr>
-                                        <p:cTn id="26" dur="500"/>
+                                        <p:cTn id="24" dur="500"/>
                                         <p:tgtEl>
                                           <p:spTgt spid="7"/>
                                         </p:tgtEl>
@@ -5290,30 +5399,21 @@
                             </p:childTnLst>
                           </p:cTn>
                         </p:par>
-                      </p:childTnLst>
-                    </p:cTn>
-                  </p:par>
-                  <p:par>
-                    <p:cTn id="10" fill="hold">
-                      <p:stCondLst>
-                        <p:cond delay="indefinite"/>
-                      </p:stCondLst>
-                      <p:childTnLst>
                         <p:par>
-                          <p:cTn id="11" fill="hold">
+                          <p:cTn id="10" fill="hold">
                             <p:stCondLst>
-                              <p:cond delay="0"/>
+                              <p:cond delay="1000"/>
                             </p:stCondLst>
                             <p:childTnLst>
                               <p:par>
-                                <p:cTn id="12" presetID="16" presetClass="entr" presetSubtype="21" fill="hold" nodeType="clickEffect">
+                                <p:cTn id="11" presetID="16" presetClass="entr" presetSubtype="21" fill="hold" nodeType="afterEffect">
                                   <p:stCondLst>
                                     <p:cond delay="0"/>
                                   </p:stCondLst>
                                   <p:childTnLst>
                                     <p:set>
                                       <p:cBhvr>
-                                        <p:cTn id="13" dur="1" fill="hold">
+                                        <p:cTn id="12" dur="1" fill="hold">
                                           <p:stCondLst>
                                             <p:cond delay="0"/>
                                           </p:stCondLst>
@@ -5331,7 +5431,7 @@
                                     </p:set>
                                     <p:animEffect transition="in" filter="barn(inVertical)">
                                       <p:cBhvr>
-                                        <p:cTn id="14" dur="500"/>
+                                        <p:cTn id="13" dur="500"/>
                                         <p:tgtEl>
                                           <p:spTgt spid="9"/>
                                         </p:tgtEl>
@@ -5343,30 +5443,21 @@
                             </p:childTnLst>
                           </p:cTn>
                         </p:par>
-                      </p:childTnLst>
-                    </p:cTn>
-                  </p:par>
-                  <p:par>
-                    <p:cTn id="15" fill="hold">
-                      <p:stCondLst>
-                        <p:cond delay="indefinite"/>
-                      </p:stCondLst>
-                      <p:childTnLst>
                         <p:par>
-                          <p:cTn id="16" fill="hold">
+                          <p:cTn id="14" fill="hold">
                             <p:stCondLst>
-                              <p:cond delay="0"/>
+                              <p:cond delay="1500"/>
                             </p:stCondLst>
                             <p:childTnLst>
                               <p:par>
-                                <p:cTn id="17" presetID="2" presetClass="entr" presetSubtype="8" fill="hold" nodeType="clickEffect">
+                                <p:cTn id="15" presetID="2" presetClass="entr" presetSubtype="8" fill="hold" nodeType="afterEffect">
                                   <p:stCondLst>
                                     <p:cond delay="0"/>
                                   </p:stCondLst>
                                   <p:childTnLst>
                                     <p:set>
                                       <p:cBhvr>
-                                        <p:cTn id="18" dur="1" fill="hold">
+                                        <p:cTn id="16" dur="1" fill="hold">
                                           <p:stCondLst>
                                             <p:cond delay="0"/>
                                           </p:stCondLst>
@@ -5388,7 +5479,7 @@
                                     </p:set>
                                     <p:anim calcmode="lin" valueType="num">
                                       <p:cBhvr additive="base">
-                                        <p:cTn id="19" dur="500" fill="hold"/>
+                                        <p:cTn id="17" dur="500" fill="hold"/>
                                         <p:tgtEl>
                                           <p:spTgt spid="3">
                                             <p:txEl>
@@ -5415,7 +5506,7 @@
                                     </p:anim>
                                     <p:anim calcmode="lin" valueType="num">
                                       <p:cBhvr additive="base">
-                                        <p:cTn id="20" dur="500" fill="hold"/>
+                                        <p:cTn id="18" dur="500" fill="hold"/>
                                         <p:tgtEl>
                                           <p:spTgt spid="3">
                                             <p:txEl>
@@ -5475,7 +5566,7 @@
 </file>
 
 <file path=ppt/slides/slide5.xml><?xml version="1.0" encoding="utf-8"?>
-<p:sld xmlns:a="http://schemas.openxmlformats.org/drawingml/2006/main" xmlns:r="http://schemas.openxmlformats.org/officeDocument/2006/relationships" xmlns:p="http://schemas.openxmlformats.org/presentationml/2006/main">
+<p:sld xmlns:a="http://schemas.openxmlformats.org/drawingml/2006/main" xmlns:r="http://schemas.openxmlformats.org/officeDocument/2006/relationships" xmlns:p="http://schemas.openxmlformats.org/presentationml/2006/main" showMasterSp="0">
   <p:cSld>
     <p:spTree>
       <p:nvGrpSpPr>
@@ -5610,10 +5701,10 @@
       </p:sp>
       <p:pic>
         <p:nvPicPr>
-          <p:cNvPr id="10" name="Content Placeholder 6">
-            <a:extLst>
-              <a:ext uri="{FF2B5EF4-FFF2-40B4-BE49-F238E27FC236}">
-                <a16:creationId xmlns:a16="http://schemas.microsoft.com/office/drawing/2014/main" id="{5127E62C-C024-7323-C5FD-18428A7517EC}"/>
+          <p:cNvPr id="4" name="Kép 3">
+            <a:extLst>
+              <a:ext uri="{FF2B5EF4-FFF2-40B4-BE49-F238E27FC236}">
+                <a16:creationId xmlns:a16="http://schemas.microsoft.com/office/drawing/2014/main" id="{B47C0EE2-2030-4C0C-80EF-B7AD70F51DB0}"/>
               </a:ext>
             </a:extLst>
           </p:cNvPr>
@@ -5636,8 +5727,8 @@
         </p:blipFill>
         <p:spPr>
           <a:xfrm>
-            <a:off x="2507733" y="2735580"/>
-            <a:ext cx="7176534" cy="4036800"/>
+            <a:off x="2507732" y="2704658"/>
+            <a:ext cx="7176535" cy="4036801"/>
           </a:xfrm>
           <a:prstGeom prst="rect">
             <a:avLst/>
@@ -5777,36 +5868,27 @@
                             </p:childTnLst>
                           </p:cTn>
                         </p:par>
-                      </p:childTnLst>
-                    </p:cTn>
-                  </p:par>
-                  <p:par>
-                    <p:cTn id="10" fill="hold">
-                      <p:stCondLst>
-                        <p:cond delay="indefinite"/>
-                      </p:stCondLst>
-                      <p:childTnLst>
                         <p:par>
-                          <p:cTn id="11" fill="hold">
+                          <p:cTn id="10" fill="hold">
                             <p:stCondLst>
-                              <p:cond delay="0"/>
+                              <p:cond delay="1000"/>
                             </p:stCondLst>
                             <p:childTnLst>
                               <p:par>
-                                <p:cTn id="12" presetID="16" presetClass="entr" presetSubtype="21" fill="hold" nodeType="clickEffect">
+                                <p:cTn id="11" presetID="16" presetClass="entr" presetSubtype="21" fill="hold" nodeType="afterEffect">
                                   <p:stCondLst>
                                     <p:cond delay="0"/>
                                   </p:stCondLst>
                                   <p:childTnLst>
                                     <p:set>
                                       <p:cBhvr>
-                                        <p:cTn id="13" dur="1" fill="hold">
+                                        <p:cTn id="12" dur="1" fill="hold">
                                           <p:stCondLst>
                                             <p:cond delay="0"/>
                                           </p:stCondLst>
                                         </p:cTn>
                                         <p:tgtEl>
-                                          <p:spTgt spid="10"/>
+                                          <p:spTgt spid="4"/>
                                         </p:tgtEl>
                                         <p:attrNameLst>
                                           <p:attrName>style.visibility</p:attrName>
@@ -5818,9 +5900,9 @@
                                     </p:set>
                                     <p:animEffect transition="in" filter="barn(inVertical)">
                                       <p:cBhvr>
-                                        <p:cTn id="14" dur="500"/>
+                                        <p:cTn id="13" dur="500"/>
                                         <p:tgtEl>
-                                          <p:spTgt spid="10"/>
+                                          <p:spTgt spid="4"/>
                                         </p:tgtEl>
                                       </p:cBhvr>
                                     </p:animEffect>
@@ -5942,13 +6024,23 @@
             </a:endParaRPr>
           </a:p>
           <a:p>
+            <a:pPr marL="0" indent="0">
+              <a:buNone/>
+            </a:pPr>
+            <a:endParaRPr lang="hu-HU" dirty="0">
+              <a:solidFill>
+                <a:schemeClr val="bg1"/>
+              </a:solidFill>
+            </a:endParaRPr>
+          </a:p>
+          <a:p>
             <a:r>
               <a:rPr lang="hu-HU" dirty="0">
                 <a:solidFill>
                   <a:schemeClr val="bg1"/>
                 </a:solidFill>
               </a:rPr>
-              <a:t>A 3-mas billentyű lenyomásával kitörölhetjük a korábbiakat.       Ezután teljesen előlről, a főmenü jelenik meg, és ugyanúgy használhatjuk tovább, mint eddig. </a:t>
+              <a:t>A 3-mas billentyű lenyomásával kitörölhetjük a korábbiakat.       Ezután teljesen előlről, ismét a főmenü jelenik meg. </a:t>
             </a:r>
           </a:p>
         </p:txBody>
@@ -6006,6 +6098,76 @@
           </a:p>
         </p:txBody>
       </p:sp>
+      <p:pic>
+        <p:nvPicPr>
+          <p:cNvPr id="5" name="Content Placeholder 6">
+            <a:extLst>
+              <a:ext uri="{FF2B5EF4-FFF2-40B4-BE49-F238E27FC236}">
+                <a16:creationId xmlns:a16="http://schemas.microsoft.com/office/drawing/2014/main" id="{C60A578E-B765-4A14-A26C-7442FEE06C34}"/>
+              </a:ext>
+            </a:extLst>
+          </p:cNvPr>
+          <p:cNvPicPr>
+            <a:picLocks noChangeAspect="1"/>
+          </p:cNvPicPr>
+          <p:nvPr/>
+        </p:nvPicPr>
+        <p:blipFill rotWithShape="1">
+          <a:blip r:embed="rId3">
+            <a:extLst>
+              <a:ext uri="{28A0092B-C50C-407E-A947-70E740481C1C}">
+                <a14:useLocalDpi xmlns:a14="http://schemas.microsoft.com/office/drawing/2010/main" val="0"/>
+              </a:ext>
+            </a:extLst>
+          </a:blip>
+          <a:srcRect t="51920"/>
+          <a:stretch/>
+        </p:blipFill>
+        <p:spPr>
+          <a:xfrm>
+            <a:off x="1202596" y="1344360"/>
+            <a:ext cx="6936414" cy="1875934"/>
+          </a:xfrm>
+          <a:prstGeom prst="rect">
+            <a:avLst/>
+          </a:prstGeom>
+        </p:spPr>
+      </p:pic>
+      <p:pic>
+        <p:nvPicPr>
+          <p:cNvPr id="8" name="Picture 20">
+            <a:extLst>
+              <a:ext uri="{FF2B5EF4-FFF2-40B4-BE49-F238E27FC236}">
+                <a16:creationId xmlns:a16="http://schemas.microsoft.com/office/drawing/2014/main" id="{474D04A2-0A50-4B48-B5E1-BC5C31B38A03}"/>
+              </a:ext>
+            </a:extLst>
+          </p:cNvPr>
+          <p:cNvPicPr>
+            <a:picLocks noChangeAspect="1"/>
+          </p:cNvPicPr>
+          <p:nvPr/>
+        </p:nvPicPr>
+        <p:blipFill rotWithShape="1">
+          <a:blip r:embed="rId4">
+            <a:extLst>
+              <a:ext uri="{28A0092B-C50C-407E-A947-70E740481C1C}">
+                <a14:useLocalDpi xmlns:a14="http://schemas.microsoft.com/office/drawing/2010/main" val="0"/>
+              </a:ext>
+            </a:extLst>
+          </a:blip>
+          <a:srcRect b="51920"/>
+          <a:stretch/>
+        </p:blipFill>
+        <p:spPr>
+          <a:xfrm>
+            <a:off x="1202596" y="4301029"/>
+            <a:ext cx="6936414" cy="1875934"/>
+          </a:xfrm>
+          <a:prstGeom prst="rect">
+            <a:avLst/>
+          </a:prstGeom>
+        </p:spPr>
+      </p:pic>
     </p:spTree>
     <p:extLst>
       <p:ext uri="{BB962C8B-B14F-4D97-AF65-F5344CB8AC3E}">
@@ -6055,7 +6217,7 @@
                                         <p:tgtEl>
                                           <p:spTgt spid="3">
                                             <p:txEl>
-                                              <p:pRg st="2" end="2"/>
+                                              <p:pRg st="3" end="3"/>
                                             </p:txEl>
                                           </p:spTgt>
                                         </p:tgtEl>
@@ -6073,7 +6235,7 @@
                                         <p:tgtEl>
                                           <p:spTgt spid="3">
                                             <p:txEl>
-                                              <p:pRg st="2" end="2"/>
+                                              <p:pRg st="3" end="3"/>
                                             </p:txEl>
                                           </p:spTgt>
                                         </p:tgtEl>
@@ -6085,7 +6247,7 @@
                                         <p:tgtEl>
                                           <p:spTgt spid="3">
                                             <p:txEl>
-                                              <p:pRg st="2" end="2"/>
+                                              <p:pRg st="3" end="3"/>
                                             </p:txEl>
                                           </p:spTgt>
                                         </p:tgtEl>
@@ -6112,7 +6274,7 @@
                                         <p:tgtEl>
                                           <p:spTgt spid="3">
                                             <p:txEl>
-                                              <p:pRg st="2" end="2"/>
+                                              <p:pRg st="3" end="3"/>
                                             </p:txEl>
                                           </p:spTgt>
                                         </p:tgtEl>
@@ -6133,6 +6295,94 @@
                                         </p:tav>
                                       </p:tavLst>
                                     </p:anim>
+                                  </p:childTnLst>
+                                </p:cTn>
+                              </p:par>
+                            </p:childTnLst>
+                          </p:cTn>
+                        </p:par>
+                        <p:par>
+                          <p:cTn id="10" fill="hold">
+                            <p:stCondLst>
+                              <p:cond delay="1000"/>
+                            </p:stCondLst>
+                            <p:childTnLst>
+                              <p:par>
+                                <p:cTn id="11" presetID="16" presetClass="entr" presetSubtype="21" fill="hold" nodeType="afterEffect">
+                                  <p:stCondLst>
+                                    <p:cond delay="0"/>
+                                  </p:stCondLst>
+                                  <p:childTnLst>
+                                    <p:set>
+                                      <p:cBhvr>
+                                        <p:cTn id="12" dur="1" fill="hold">
+                                          <p:stCondLst>
+                                            <p:cond delay="0"/>
+                                          </p:stCondLst>
+                                        </p:cTn>
+                                        <p:tgtEl>
+                                          <p:spTgt spid="5"/>
+                                        </p:tgtEl>
+                                        <p:attrNameLst>
+                                          <p:attrName>style.visibility</p:attrName>
+                                        </p:attrNameLst>
+                                      </p:cBhvr>
+                                      <p:to>
+                                        <p:strVal val="visible"/>
+                                      </p:to>
+                                    </p:set>
+                                    <p:animEffect transition="in" filter="barn(inVertical)">
+                                      <p:cBhvr>
+                                        <p:cTn id="13" dur="500"/>
+                                        <p:tgtEl>
+                                          <p:spTgt spid="5"/>
+                                        </p:tgtEl>
+                                      </p:cBhvr>
+                                    </p:animEffect>
+                                  </p:childTnLst>
+                                </p:cTn>
+                              </p:par>
+                            </p:childTnLst>
+                          </p:cTn>
+                        </p:par>
+                        <p:par>
+                          <p:cTn id="14" fill="hold">
+                            <p:stCondLst>
+                              <p:cond delay="1500"/>
+                            </p:stCondLst>
+                            <p:childTnLst>
+                              <p:par>
+                                <p:cTn id="15" presetID="16" presetClass="entr" presetSubtype="21" fill="hold" nodeType="afterEffect">
+                                  <p:stCondLst>
+                                    <p:cond delay="2000"/>
+                                  </p:stCondLst>
+                                  <p:childTnLst>
+                                    <p:set>
+                                      <p:cBhvr>
+                                        <p:cTn id="16" dur="1" fill="hold">
+                                          <p:stCondLst>
+                                            <p:cond delay="0"/>
+                                          </p:stCondLst>
+                                        </p:cTn>
+                                        <p:tgtEl>
+                                          <p:spTgt spid="8"/>
+                                        </p:tgtEl>
+                                        <p:attrNameLst>
+                                          <p:attrName>style.visibility</p:attrName>
+                                        </p:attrNameLst>
+                                      </p:cBhvr>
+                                      <p:to>
+                                        <p:strVal val="visible"/>
+                                      </p:to>
+                                    </p:set>
+                                    <p:animEffect transition="in" filter="barn(inVertical)">
+                                      <p:cBhvr>
+                                        <p:cTn id="17" dur="500"/>
+                                        <p:tgtEl>
+                                          <p:spTgt spid="8"/>
+                                        </p:tgtEl>
+                                      </p:cBhvr>
+                                    </p:animEffect>
                                   </p:childTnLst>
                                 </p:cTn>
                               </p:par>
@@ -6477,7 +6727,7 @@
 </file>
 
 <file path=ppt/slides/slide8.xml><?xml version="1.0" encoding="utf-8"?>
-<p:sld xmlns:a="http://schemas.openxmlformats.org/drawingml/2006/main" xmlns:r="http://schemas.openxmlformats.org/officeDocument/2006/relationships" xmlns:p="http://schemas.openxmlformats.org/presentationml/2006/main">
+<p:sld xmlns:a="http://schemas.openxmlformats.org/drawingml/2006/main" xmlns:r="http://schemas.openxmlformats.org/officeDocument/2006/relationships" xmlns:p="http://schemas.openxmlformats.org/presentationml/2006/main" showMasterSp="0">
   <p:cSld>
     <p:spTree>
       <p:nvGrpSpPr>
@@ -6865,6 +7115,21 @@
 </file>
 
 <file path=customXml/item1.xml><?xml version="1.0" encoding="utf-8"?>
+<p:properties xmlns:p="http://schemas.microsoft.com/office/2006/metadata/properties" xmlns:xsi="http://www.w3.org/2001/XMLSchema-instance" xmlns:pc="http://schemas.microsoft.com/office/infopath/2007/PartnerControls">
+  <documentManagement/>
+</p:properties>
+</file>
+
+<file path=customXml/item2.xml><?xml version="1.0" encoding="utf-8"?>
+<?mso-contentType ?>
+<FormTemplates xmlns="http://schemas.microsoft.com/sharepoint/v3/contenttype/forms">
+  <Display>DocumentLibraryForm</Display>
+  <Edit>DocumentLibraryForm</Edit>
+  <New>DocumentLibraryForm</New>
+</FormTemplates>
+</file>
+
+<file path=customXml/item3.xml><?xml version="1.0" encoding="utf-8"?>
 <ct:contentTypeSchema xmlns:ct="http://schemas.microsoft.com/office/2006/metadata/contentType" xmlns:ma="http://schemas.microsoft.com/office/2006/metadata/properties/metaAttributes" ct:_="" ma:_="" ma:contentTypeName="Dokumentum" ma:contentTypeID="0x010100E5B8FE703E369947997187BFADE1AF83" ma:contentTypeVersion="1" ma:contentTypeDescription="Új dokumentum létrehozása." ma:contentTypeScope="" ma:versionID="f7f01756cbbb63b1cd4dbdca50430bfa">
   <xsd:schema xmlns:xsd="http://www.w3.org/2001/XMLSchema" xmlns:xs="http://www.w3.org/2001/XMLSchema" xmlns:p="http://schemas.microsoft.com/office/2006/metadata/properties" xmlns:ns3="794b48b7-b14e-471d-9d6a-d8c19bd5f0ba" targetNamespace="http://schemas.microsoft.com/office/2006/metadata/properties" ma:root="true" ma:fieldsID="bd2ec039ad7408eaa6c8ce9505317132" ns3:_="">
     <xsd:import namespace="794b48b7-b14e-471d-9d6a-d8c19bd5f0ba"/>
@@ -6990,22 +7255,24 @@
 </ct:contentTypeSchema>
 </file>
 
-<file path=customXml/item2.xml><?xml version="1.0" encoding="utf-8"?>
-<?mso-contentType ?>
-<FormTemplates xmlns="http://schemas.microsoft.com/sharepoint/v3/contenttype/forms">
-  <Display>DocumentLibraryForm</Display>
-  <Edit>DocumentLibraryForm</Edit>
-  <New>DocumentLibraryForm</New>
-</FormTemplates>
+<file path=customXml/itemProps1.xml><?xml version="1.0" encoding="utf-8"?>
+<ds:datastoreItem xmlns:ds="http://schemas.openxmlformats.org/officeDocument/2006/customXml" ds:itemID="{0F00AC4C-D4E4-4341-88F0-CF4532589865}">
+  <ds:schemaRefs>
+    <ds:schemaRef ds:uri="http://schemas.microsoft.com/office/2006/metadata/properties"/>
+    <ds:schemaRef ds:uri="http://schemas.microsoft.com/office/infopath/2007/PartnerControls"/>
+  </ds:schemaRefs>
+</ds:datastoreItem>
 </file>
 
-<file path=customXml/item3.xml><?xml version="1.0" encoding="utf-8"?>
-<p:properties xmlns:p="http://schemas.microsoft.com/office/2006/metadata/properties" xmlns:xsi="http://www.w3.org/2001/XMLSchema-instance" xmlns:pc="http://schemas.microsoft.com/office/infopath/2007/PartnerControls">
-  <documentManagement/>
-</p:properties>
+<file path=customXml/itemProps2.xml><?xml version="1.0" encoding="utf-8"?>
+<ds:datastoreItem xmlns:ds="http://schemas.openxmlformats.org/officeDocument/2006/customXml" ds:itemID="{0CAA3E4C-5FB1-4A85-A6B9-BE70DA4A5AFF}">
+  <ds:schemaRefs>
+    <ds:schemaRef ds:uri="http://schemas.microsoft.com/sharepoint/v3/contenttype/forms"/>
+  </ds:schemaRefs>
+</ds:datastoreItem>
 </file>
 
-<file path=customXml/itemProps1.xml><?xml version="1.0" encoding="utf-8"?>
+<file path=customXml/itemProps3.xml><?xml version="1.0" encoding="utf-8"?>
 <ds:datastoreItem xmlns:ds="http://schemas.openxmlformats.org/officeDocument/2006/customXml" ds:itemID="{B8177A3D-C342-42BE-BC93-7FB4CEE702D3}">
   <ds:schemaRefs>
     <ds:schemaRef ds:uri="http://schemas.microsoft.com/office/2006/metadata/contentType"/>
@@ -7021,21 +7288,4 @@
     <ds:schemaRef ds:uri="http://schemas.microsoft.com/internal/obd"/>
   </ds:schemaRefs>
 </ds:datastoreItem>
-</file>
-
-<file path=customXml/itemProps2.xml><?xml version="1.0" encoding="utf-8"?>
-<ds:datastoreItem xmlns:ds="http://schemas.openxmlformats.org/officeDocument/2006/customXml" ds:itemID="{0CAA3E4C-5FB1-4A85-A6B9-BE70DA4A5AFF}">
-  <ds:schemaRefs>
-    <ds:schemaRef ds:uri="http://schemas.microsoft.com/sharepoint/v3/contenttype/forms"/>
-  </ds:schemaRefs>
-</ds:datastoreItem>
-</file>
-
-<file path=customXml/itemProps3.xml><?xml version="1.0" encoding="utf-8"?>
-<ds:datastoreItem xmlns:ds="http://schemas.openxmlformats.org/officeDocument/2006/customXml" ds:itemID="{0F00AC4C-D4E4-4341-88F0-CF4532589865}">
-  <ds:schemaRefs>
-    <ds:schemaRef ds:uri="http://schemas.microsoft.com/office/2006/metadata/properties"/>
-    <ds:schemaRef ds:uri="http://schemas.microsoft.com/office/infopath/2007/PartnerControls"/>
-  </ds:schemaRefs>
-</ds:datastoreItem>
 </file>
--- a/nepesseg2025.pptx
+++ b/nepesseg2025.pptx
@@ -7,12 +7,13 @@
   <p:sldIdLst>
     <p:sldId id="256" r:id="rId5"/>
     <p:sldId id="257" r:id="rId6"/>
-    <p:sldId id="258" r:id="rId7"/>
-    <p:sldId id="259" r:id="rId8"/>
-    <p:sldId id="263" r:id="rId9"/>
-    <p:sldId id="260" r:id="rId10"/>
-    <p:sldId id="261" r:id="rId11"/>
-    <p:sldId id="262" r:id="rId12"/>
+    <p:sldId id="264" r:id="rId7"/>
+    <p:sldId id="258" r:id="rId8"/>
+    <p:sldId id="259" r:id="rId9"/>
+    <p:sldId id="263" r:id="rId10"/>
+    <p:sldId id="260" r:id="rId11"/>
+    <p:sldId id="261" r:id="rId12"/>
+    <p:sldId id="262" r:id="rId13"/>
   </p:sldIdLst>
   <p:sldSz cx="12192000" cy="6858000"/>
   <p:notesSz cx="6858000" cy="9144000"/>
@@ -3574,15 +3575,21 @@
           <a:p>
             <a:pPr lvl="1"/>
             <a:r>
-              <a:rPr lang="hu-HU" sz="2800" dirty="0">
+              <a:rPr lang="hu-HU" dirty="0">
                 <a:solidFill>
                   <a:schemeClr val="bg1"/>
                 </a:solidFill>
-                <a:hlinkClick r:id="rId2" action="ppaction://hlinksldjump"/>
+                <a:hlinkClick r:id="rId2" action="ppaction://hlinksldjump">
+                  <a:extLst>
+                    <a:ext uri="{A12FA001-AC4F-418D-AE19-62706E023703}">
+                      <ahyp:hlinkClr xmlns:ahyp="http://schemas.microsoft.com/office/drawing/2018/hyperlinkcolor" val="tx"/>
+                    </a:ext>
+                  </a:extLst>
+                </a:hlinkClick>
               </a:rPr>
               <a:t>1-es</a:t>
             </a:r>
-            <a:endParaRPr lang="hu-HU" sz="2800" dirty="0">
+            <a:endParaRPr lang="hu-HU" dirty="0">
               <a:solidFill>
                 <a:schemeClr val="bg1"/>
               </a:solidFill>
@@ -3591,15 +3598,21 @@
           <a:p>
             <a:pPr lvl="1"/>
             <a:r>
-              <a:rPr lang="hu-HU" sz="2800" dirty="0">
+              <a:rPr lang="hu-HU" dirty="0">
                 <a:solidFill>
                   <a:schemeClr val="bg1"/>
                 </a:solidFill>
-                <a:hlinkClick r:id="rId3" action="ppaction://hlinksldjump"/>
+                <a:hlinkClick r:id="rId3" action="ppaction://hlinksldjump">
+                  <a:extLst>
+                    <a:ext uri="{A12FA001-AC4F-418D-AE19-62706E023703}">
+                      <ahyp:hlinkClr xmlns:ahyp="http://schemas.microsoft.com/office/drawing/2018/hyperlinkcolor" val="tx"/>
+                    </a:ext>
+                  </a:extLst>
+                </a:hlinkClick>
               </a:rPr>
               <a:t>2-es</a:t>
             </a:r>
-            <a:endParaRPr lang="hu-HU" sz="2800" dirty="0">
+            <a:endParaRPr lang="hu-HU" dirty="0">
               <a:solidFill>
                 <a:schemeClr val="bg1"/>
               </a:solidFill>
@@ -3608,15 +3621,21 @@
           <a:p>
             <a:pPr lvl="1"/>
             <a:r>
-              <a:rPr lang="hu-HU" sz="2800" dirty="0">
+              <a:rPr lang="hu-HU" dirty="0">
                 <a:solidFill>
                   <a:schemeClr val="bg1"/>
                 </a:solidFill>
-                <a:hlinkClick r:id="rId4" action="ppaction://hlinksldjump"/>
+                <a:hlinkClick r:id="rId4" action="ppaction://hlinksldjump">
+                  <a:extLst>
+                    <a:ext uri="{A12FA001-AC4F-418D-AE19-62706E023703}">
+                      <ahyp:hlinkClr xmlns:ahyp="http://schemas.microsoft.com/office/drawing/2018/hyperlinkcolor" val="tx"/>
+                    </a:ext>
+                  </a:extLst>
+                </a:hlinkClick>
               </a:rPr>
               <a:t>3-mas</a:t>
             </a:r>
-            <a:endParaRPr lang="hu-HU" sz="2800" dirty="0">
+            <a:endParaRPr lang="hu-HU" dirty="0">
               <a:solidFill>
                 <a:schemeClr val="bg1"/>
               </a:solidFill>
@@ -3625,15 +3644,21 @@
           <a:p>
             <a:pPr lvl="1"/>
             <a:r>
-              <a:rPr lang="hu-HU" sz="2800" dirty="0">
+              <a:rPr lang="hu-HU" dirty="0">
                 <a:solidFill>
                   <a:schemeClr val="bg1"/>
                 </a:solidFill>
-                <a:hlinkClick r:id="rId5" action="ppaction://hlinksldjump"/>
+                <a:hlinkClick r:id="rId5" action="ppaction://hlinksldjump">
+                  <a:extLst>
+                    <a:ext uri="{A12FA001-AC4F-418D-AE19-62706E023703}">
+                      <ahyp:hlinkClr xmlns:ahyp="http://schemas.microsoft.com/office/drawing/2018/hyperlinkcolor" val="tx"/>
+                    </a:ext>
+                  </a:extLst>
+                </a:hlinkClick>
               </a:rPr>
               <a:t>X</a:t>
             </a:r>
-            <a:endParaRPr lang="hu-HU" sz="2800" dirty="0">
+            <a:endParaRPr lang="hu-HU" dirty="0">
               <a:solidFill>
                 <a:schemeClr val="bg1"/>
               </a:solidFill>
@@ -3675,7 +3700,7 @@
           <a:prstGeom prst="rect">
             <a:avLst/>
           </a:prstGeom>
-          <a:ln w="38100" cap="sq">
+          <a:ln w="12700" cap="sq">
             <a:solidFill>
               <a:schemeClr val="bg1"/>
             </a:solidFill>
@@ -4318,6 +4343,247 @@
 </file>
 
 <file path=ppt/slides/slide3.xml><?xml version="1.0" encoding="utf-8"?>
+<p:sld xmlns:a="http://schemas.openxmlformats.org/drawingml/2006/main" xmlns:r="http://schemas.openxmlformats.org/officeDocument/2006/relationships" xmlns:p="http://schemas.openxmlformats.org/presentationml/2006/main" show="0">
+  <p:cSld>
+    <p:spTree>
+      <p:nvGrpSpPr>
+        <p:cNvPr id="1" name=""/>
+        <p:cNvGrpSpPr/>
+        <p:nvPr/>
+      </p:nvGrpSpPr>
+      <p:grpSpPr>
+        <a:xfrm>
+          <a:off x="0" y="0"/>
+          <a:ext cx="0" cy="0"/>
+          <a:chOff x="0" y="0"/>
+          <a:chExt cx="0" cy="0"/>
+        </a:xfrm>
+      </p:grpSpPr>
+      <p:sp>
+        <p:nvSpPr>
+          <p:cNvPr id="2" name="Title 1">
+            <a:extLst>
+              <a:ext uri="{FF2B5EF4-FFF2-40B4-BE49-F238E27FC236}">
+                <a16:creationId xmlns:a16="http://schemas.microsoft.com/office/drawing/2014/main" id="{3AF9F464-74D2-A15C-07B6-0DFFF0F4C246}"/>
+              </a:ext>
+            </a:extLst>
+          </p:cNvPr>
+          <p:cNvSpPr>
+            <a:spLocks noGrp="1"/>
+          </p:cNvSpPr>
+          <p:nvPr>
+            <p:ph type="title"/>
+          </p:nvPr>
+        </p:nvSpPr>
+        <p:spPr/>
+        <p:txBody>
+          <a:bodyPr/>
+          <a:lstStyle/>
+          <a:p>
+            <a:r>
+              <a:rPr lang="hu-HU" dirty="0">
+                <a:solidFill>
+                  <a:schemeClr val="bg1"/>
+                </a:solidFill>
+              </a:rPr>
+              <a:t>Főmenü</a:t>
+            </a:r>
+          </a:p>
+        </p:txBody>
+      </p:sp>
+      <p:sp>
+        <p:nvSpPr>
+          <p:cNvPr id="19" name="Content Placeholder 18">
+            <a:extLst>
+              <a:ext uri="{FF2B5EF4-FFF2-40B4-BE49-F238E27FC236}">
+                <a16:creationId xmlns:a16="http://schemas.microsoft.com/office/drawing/2014/main" id="{DC7F195D-9D64-4BF6-658D-E23700EDF1A6}"/>
+              </a:ext>
+            </a:extLst>
+          </p:cNvPr>
+          <p:cNvSpPr>
+            <a:spLocks noGrp="1"/>
+          </p:cNvSpPr>
+          <p:nvPr>
+            <p:ph idx="1"/>
+          </p:nvPr>
+        </p:nvSpPr>
+        <p:spPr>
+          <a:noFill/>
+        </p:spPr>
+        <p:txBody>
+          <a:bodyPr/>
+          <a:lstStyle/>
+          <a:p>
+            <a:r>
+              <a:rPr lang="hu-HU" sz="3200" dirty="0">
+                <a:solidFill>
+                  <a:schemeClr val="bg1"/>
+                </a:solidFill>
+              </a:rPr>
+              <a:t>4 lehetőség:</a:t>
+            </a:r>
+          </a:p>
+          <a:p>
+            <a:pPr lvl="1"/>
+            <a:r>
+              <a:rPr lang="hu-HU" dirty="0">
+                <a:solidFill>
+                  <a:schemeClr val="bg1"/>
+                </a:solidFill>
+                <a:hlinkClick r:id="rId2" action="ppaction://hlinksldjump">
+                  <a:extLst>
+                    <a:ext uri="{A12FA001-AC4F-418D-AE19-62706E023703}">
+                      <ahyp:hlinkClr xmlns:ahyp="http://schemas.microsoft.com/office/drawing/2018/hyperlinkcolor" val="tx"/>
+                    </a:ext>
+                  </a:extLst>
+                </a:hlinkClick>
+              </a:rPr>
+              <a:t>1-es</a:t>
+            </a:r>
+            <a:endParaRPr lang="hu-HU" dirty="0">
+              <a:solidFill>
+                <a:schemeClr val="bg1"/>
+              </a:solidFill>
+            </a:endParaRPr>
+          </a:p>
+          <a:p>
+            <a:pPr lvl="1"/>
+            <a:r>
+              <a:rPr lang="hu-HU" dirty="0">
+                <a:solidFill>
+                  <a:schemeClr val="bg1"/>
+                </a:solidFill>
+                <a:hlinkClick r:id="rId3" action="ppaction://hlinksldjump">
+                  <a:extLst>
+                    <a:ext uri="{A12FA001-AC4F-418D-AE19-62706E023703}">
+                      <ahyp:hlinkClr xmlns:ahyp="http://schemas.microsoft.com/office/drawing/2018/hyperlinkcolor" val="tx"/>
+                    </a:ext>
+                  </a:extLst>
+                </a:hlinkClick>
+              </a:rPr>
+              <a:t>2-es</a:t>
+            </a:r>
+            <a:endParaRPr lang="hu-HU" dirty="0">
+              <a:solidFill>
+                <a:schemeClr val="bg1"/>
+              </a:solidFill>
+            </a:endParaRPr>
+          </a:p>
+          <a:p>
+            <a:pPr lvl="1"/>
+            <a:r>
+              <a:rPr lang="hu-HU" dirty="0">
+                <a:solidFill>
+                  <a:schemeClr val="bg1"/>
+                </a:solidFill>
+                <a:hlinkClick r:id="rId4" action="ppaction://hlinksldjump">
+                  <a:extLst>
+                    <a:ext uri="{A12FA001-AC4F-418D-AE19-62706E023703}">
+                      <ahyp:hlinkClr xmlns:ahyp="http://schemas.microsoft.com/office/drawing/2018/hyperlinkcolor" val="tx"/>
+                    </a:ext>
+                  </a:extLst>
+                </a:hlinkClick>
+              </a:rPr>
+              <a:t>3-mas</a:t>
+            </a:r>
+            <a:endParaRPr lang="hu-HU" dirty="0">
+              <a:solidFill>
+                <a:schemeClr val="bg1"/>
+              </a:solidFill>
+            </a:endParaRPr>
+          </a:p>
+          <a:p>
+            <a:pPr lvl="1"/>
+            <a:r>
+              <a:rPr lang="hu-HU" dirty="0">
+                <a:solidFill>
+                  <a:schemeClr val="bg1"/>
+                </a:solidFill>
+                <a:hlinkClick r:id="rId5" action="ppaction://hlinksldjump">
+                  <a:extLst>
+                    <a:ext uri="{A12FA001-AC4F-418D-AE19-62706E023703}">
+                      <ahyp:hlinkClr xmlns:ahyp="http://schemas.microsoft.com/office/drawing/2018/hyperlinkcolor" val="tx"/>
+                    </a:ext>
+                  </a:extLst>
+                </a:hlinkClick>
+              </a:rPr>
+              <a:t>X</a:t>
+            </a:r>
+            <a:endParaRPr lang="hu-HU" dirty="0">
+              <a:solidFill>
+                <a:schemeClr val="bg1"/>
+              </a:solidFill>
+            </a:endParaRPr>
+          </a:p>
+        </p:txBody>
+      </p:sp>
+      <p:pic>
+        <p:nvPicPr>
+          <p:cNvPr id="21" name="Picture 20">
+            <a:extLst>
+              <a:ext uri="{FF2B5EF4-FFF2-40B4-BE49-F238E27FC236}">
+                <a16:creationId xmlns:a16="http://schemas.microsoft.com/office/drawing/2014/main" id="{4449E073-A96A-08D1-B89B-1FD946AED206}"/>
+              </a:ext>
+            </a:extLst>
+          </p:cNvPr>
+          <p:cNvPicPr>
+            <a:picLocks noChangeAspect="1"/>
+          </p:cNvPicPr>
+          <p:nvPr/>
+        </p:nvPicPr>
+        <p:blipFill>
+          <a:blip r:embed="rId6">
+            <a:extLst>
+              <a:ext uri="{28A0092B-C50C-407E-A947-70E740481C1C}">
+                <a14:useLocalDpi xmlns:a14="http://schemas.microsoft.com/office/drawing/2010/main" val="0"/>
+              </a:ext>
+            </a:extLst>
+          </a:blip>
+          <a:stretch>
+            <a:fillRect/>
+          </a:stretch>
+        </p:blipFill>
+        <p:spPr>
+          <a:xfrm>
+            <a:off x="3682303" y="1351323"/>
+            <a:ext cx="8356774" cy="4700685"/>
+          </a:xfrm>
+          <a:prstGeom prst="rect">
+            <a:avLst/>
+          </a:prstGeom>
+          <a:ln w="12700" cap="sq">
+            <a:solidFill>
+              <a:schemeClr val="bg1"/>
+            </a:solidFill>
+            <a:prstDash val="solid"/>
+            <a:miter lim="800000"/>
+          </a:ln>
+          <a:effectLst>
+            <a:outerShdw blurRad="50800" dist="38100" dir="2700000" algn="tl" rotWithShape="0">
+              <a:srgbClr val="000000">
+                <a:alpha val="43000"/>
+              </a:srgbClr>
+            </a:outerShdw>
+          </a:effectLst>
+        </p:spPr>
+      </p:pic>
+    </p:spTree>
+    <p:extLst>
+      <p:ext uri="{BB962C8B-B14F-4D97-AF65-F5344CB8AC3E}">
+        <p14:creationId xmlns:p14="http://schemas.microsoft.com/office/powerpoint/2010/main" val="3926699447"/>
+      </p:ext>
+    </p:extLst>
+  </p:cSld>
+  <p:clrMapOvr>
+    <a:masterClrMapping/>
+  </p:clrMapOvr>
+  <p:transition spd="slow">
+    <p:cover/>
+  </p:transition>
+</p:sld>
+</file>
+
+<file path=ppt/slides/slide4.xml><?xml version="1.0" encoding="utf-8"?>
 <p:sld xmlns:a="http://schemas.openxmlformats.org/drawingml/2006/main" xmlns:r="http://schemas.openxmlformats.org/officeDocument/2006/relationships" xmlns:p="http://schemas.openxmlformats.org/presentationml/2006/main" showMasterSp="0">
   <p:cSld>
     <p:spTree>
@@ -4457,12 +4723,12 @@
           <a:prstGeom prst="rect">
             <a:avLst/>
           </a:prstGeom>
-          <a:ln w="19050" cap="rnd">
+          <a:ln w="12700" cap="sq" cmpd="sng">
             <a:solidFill>
               <a:schemeClr val="bg1"/>
             </a:solidFill>
-            <a:prstDash val="dash"/>
-            <a:bevel/>
+            <a:prstDash val="solid"/>
+            <a:miter lim="800000"/>
             <a:extLst>
               <a:ext uri="{C807C97D-BFC1-408E-A445-0C87EB9F89A2}">
                 <ask:lineSketchStyleProps xmlns:ask="http://schemas.microsoft.com/office/drawing/2018/sketchyshapes" sd="1219033472">
@@ -4471,14 +4737,56 @@
                     <a:gdLst>
                       <a:gd name="connsiteX0" fmla="*/ 0 w 5427135"/>
                       <a:gd name="connsiteY0" fmla="*/ 0 h 782425"/>
-                      <a:gd name="connsiteX1" fmla="*/ 5427135 w 5427135"/>
+                      <a:gd name="connsiteX1" fmla="*/ 379899 w 5427135"/>
                       <a:gd name="connsiteY1" fmla="*/ 0 h 782425"/>
-                      <a:gd name="connsiteX2" fmla="*/ 5427135 w 5427135"/>
-                      <a:gd name="connsiteY2" fmla="*/ 782425 h 782425"/>
-                      <a:gd name="connsiteX3" fmla="*/ 0 w 5427135"/>
-                      <a:gd name="connsiteY3" fmla="*/ 782425 h 782425"/>
-                      <a:gd name="connsiteX4" fmla="*/ 0 w 5427135"/>
+                      <a:gd name="connsiteX2" fmla="*/ 1031156 w 5427135"/>
+                      <a:gd name="connsiteY2" fmla="*/ 0 h 782425"/>
+                      <a:gd name="connsiteX3" fmla="*/ 1628141 w 5427135"/>
+                      <a:gd name="connsiteY3" fmla="*/ 0 h 782425"/>
+                      <a:gd name="connsiteX4" fmla="*/ 2008040 w 5427135"/>
                       <a:gd name="connsiteY4" fmla="*/ 0 h 782425"/>
+                      <a:gd name="connsiteX5" fmla="*/ 2496482 w 5427135"/>
+                      <a:gd name="connsiteY5" fmla="*/ 0 h 782425"/>
+                      <a:gd name="connsiteX6" fmla="*/ 3147738 w 5427135"/>
+                      <a:gd name="connsiteY6" fmla="*/ 0 h 782425"/>
+                      <a:gd name="connsiteX7" fmla="*/ 3690452 w 5427135"/>
+                      <a:gd name="connsiteY7" fmla="*/ 0 h 782425"/>
+                      <a:gd name="connsiteX8" fmla="*/ 4287437 w 5427135"/>
+                      <a:gd name="connsiteY8" fmla="*/ 0 h 782425"/>
+                      <a:gd name="connsiteX9" fmla="*/ 4775879 w 5427135"/>
+                      <a:gd name="connsiteY9" fmla="*/ 0 h 782425"/>
+                      <a:gd name="connsiteX10" fmla="*/ 5427135 w 5427135"/>
+                      <a:gd name="connsiteY10" fmla="*/ 0 h 782425"/>
+                      <a:gd name="connsiteX11" fmla="*/ 5427135 w 5427135"/>
+                      <a:gd name="connsiteY11" fmla="*/ 406861 h 782425"/>
+                      <a:gd name="connsiteX12" fmla="*/ 5427135 w 5427135"/>
+                      <a:gd name="connsiteY12" fmla="*/ 782425 h 782425"/>
+                      <a:gd name="connsiteX13" fmla="*/ 5047236 w 5427135"/>
+                      <a:gd name="connsiteY13" fmla="*/ 782425 h 782425"/>
+                      <a:gd name="connsiteX14" fmla="*/ 4667336 w 5427135"/>
+                      <a:gd name="connsiteY14" fmla="*/ 782425 h 782425"/>
+                      <a:gd name="connsiteX15" fmla="*/ 4070351 w 5427135"/>
+                      <a:gd name="connsiteY15" fmla="*/ 782425 h 782425"/>
+                      <a:gd name="connsiteX16" fmla="*/ 3690452 w 5427135"/>
+                      <a:gd name="connsiteY16" fmla="*/ 782425 h 782425"/>
+                      <a:gd name="connsiteX17" fmla="*/ 3147738 w 5427135"/>
+                      <a:gd name="connsiteY17" fmla="*/ 782425 h 782425"/>
+                      <a:gd name="connsiteX18" fmla="*/ 2713568 w 5427135"/>
+                      <a:gd name="connsiteY18" fmla="*/ 782425 h 782425"/>
+                      <a:gd name="connsiteX19" fmla="*/ 2170854 w 5427135"/>
+                      <a:gd name="connsiteY19" fmla="*/ 782425 h 782425"/>
+                      <a:gd name="connsiteX20" fmla="*/ 1628141 w 5427135"/>
+                      <a:gd name="connsiteY20" fmla="*/ 782425 h 782425"/>
+                      <a:gd name="connsiteX21" fmla="*/ 1085427 w 5427135"/>
+                      <a:gd name="connsiteY21" fmla="*/ 782425 h 782425"/>
+                      <a:gd name="connsiteX22" fmla="*/ 542714 w 5427135"/>
+                      <a:gd name="connsiteY22" fmla="*/ 782425 h 782425"/>
+                      <a:gd name="connsiteX23" fmla="*/ 0 w 5427135"/>
+                      <a:gd name="connsiteY23" fmla="*/ 782425 h 782425"/>
+                      <a:gd name="connsiteX24" fmla="*/ 0 w 5427135"/>
+                      <a:gd name="connsiteY24" fmla="*/ 383388 h 782425"/>
+                      <a:gd name="connsiteX25" fmla="*/ 0 w 5427135"/>
+                      <a:gd name="connsiteY25" fmla="*/ 0 h 782425"/>
                     </a:gdLst>
                     <a:ahLst/>
                     <a:cxnLst>
@@ -4497,6 +4805,69 @@
                       <a:cxn ang="0">
                         <a:pos x="connsiteX4" y="connsiteY4"/>
                       </a:cxn>
+                      <a:cxn ang="0">
+                        <a:pos x="connsiteX5" y="connsiteY5"/>
+                      </a:cxn>
+                      <a:cxn ang="0">
+                        <a:pos x="connsiteX6" y="connsiteY6"/>
+                      </a:cxn>
+                      <a:cxn ang="0">
+                        <a:pos x="connsiteX7" y="connsiteY7"/>
+                      </a:cxn>
+                      <a:cxn ang="0">
+                        <a:pos x="connsiteX8" y="connsiteY8"/>
+                      </a:cxn>
+                      <a:cxn ang="0">
+                        <a:pos x="connsiteX9" y="connsiteY9"/>
+                      </a:cxn>
+                      <a:cxn ang="0">
+                        <a:pos x="connsiteX10" y="connsiteY10"/>
+                      </a:cxn>
+                      <a:cxn ang="0">
+                        <a:pos x="connsiteX11" y="connsiteY11"/>
+                      </a:cxn>
+                      <a:cxn ang="0">
+                        <a:pos x="connsiteX12" y="connsiteY12"/>
+                      </a:cxn>
+                      <a:cxn ang="0">
+                        <a:pos x="connsiteX13" y="connsiteY13"/>
+                      </a:cxn>
+                      <a:cxn ang="0">
+                        <a:pos x="connsiteX14" y="connsiteY14"/>
+                      </a:cxn>
+                      <a:cxn ang="0">
+                        <a:pos x="connsiteX15" y="connsiteY15"/>
+                      </a:cxn>
+                      <a:cxn ang="0">
+                        <a:pos x="connsiteX16" y="connsiteY16"/>
+                      </a:cxn>
+                      <a:cxn ang="0">
+                        <a:pos x="connsiteX17" y="connsiteY17"/>
+                      </a:cxn>
+                      <a:cxn ang="0">
+                        <a:pos x="connsiteX18" y="connsiteY18"/>
+                      </a:cxn>
+                      <a:cxn ang="0">
+                        <a:pos x="connsiteX19" y="connsiteY19"/>
+                      </a:cxn>
+                      <a:cxn ang="0">
+                        <a:pos x="connsiteX20" y="connsiteY20"/>
+                      </a:cxn>
+                      <a:cxn ang="0">
+                        <a:pos x="connsiteX21" y="connsiteY21"/>
+                      </a:cxn>
+                      <a:cxn ang="0">
+                        <a:pos x="connsiteX22" y="connsiteY22"/>
+                      </a:cxn>
+                      <a:cxn ang="0">
+                        <a:pos x="connsiteX23" y="connsiteY23"/>
+                      </a:cxn>
+                      <a:cxn ang="0">
+                        <a:pos x="connsiteX24" y="connsiteY24"/>
+                      </a:cxn>
+                      <a:cxn ang="0">
+                        <a:pos x="connsiteX25" y="connsiteY25"/>
+                      </a:cxn>
                     </a:cxnLst>
                     <a:rect l="l" t="t" r="r" b="b"/>
                     <a:pathLst>
@@ -4505,23 +4876,128 @@
                           <a:pt x="0" y="0"/>
                         </a:moveTo>
                         <a:cubicBezTo>
-                          <a:pt x="2316607" y="-49533"/>
-                          <a:pt x="2999781" y="-14809"/>
+                          <a:pt x="183999" y="-1255"/>
+                          <a:pt x="248669" y="25085"/>
+                          <a:pt x="379899" y="0"/>
+                        </a:cubicBezTo>
+                        <a:cubicBezTo>
+                          <a:pt x="511129" y="-25085"/>
+                          <a:pt x="856038" y="63278"/>
+                          <a:pt x="1031156" y="0"/>
+                        </a:cubicBezTo>
+                        <a:cubicBezTo>
+                          <a:pt x="1206274" y="-63278"/>
+                          <a:pt x="1444844" y="56318"/>
+                          <a:pt x="1628141" y="0"/>
+                        </a:cubicBezTo>
+                        <a:cubicBezTo>
+                          <a:pt x="1811439" y="-56318"/>
+                          <a:pt x="1911255" y="27025"/>
+                          <a:pt x="2008040" y="0"/>
+                        </a:cubicBezTo>
+                        <a:cubicBezTo>
+                          <a:pt x="2104825" y="-27025"/>
+                          <a:pt x="2254126" y="22756"/>
+                          <a:pt x="2496482" y="0"/>
+                        </a:cubicBezTo>
+                        <a:cubicBezTo>
+                          <a:pt x="2738838" y="-22756"/>
+                          <a:pt x="3011398" y="7124"/>
+                          <a:pt x="3147738" y="0"/>
+                        </a:cubicBezTo>
+                        <a:cubicBezTo>
+                          <a:pt x="3284078" y="-7124"/>
+                          <a:pt x="3546114" y="347"/>
+                          <a:pt x="3690452" y="0"/>
+                        </a:cubicBezTo>
+                        <a:cubicBezTo>
+                          <a:pt x="3834790" y="-347"/>
+                          <a:pt x="4042691" y="43564"/>
+                          <a:pt x="4287437" y="0"/>
+                        </a:cubicBezTo>
+                        <a:cubicBezTo>
+                          <a:pt x="4532184" y="-43564"/>
+                          <a:pt x="4624958" y="33085"/>
+                          <a:pt x="4775879" y="0"/>
+                        </a:cubicBezTo>
+                        <a:cubicBezTo>
+                          <a:pt x="4926800" y="-33085"/>
+                          <a:pt x="5167448" y="22197"/>
                           <a:pt x="5427135" y="0"/>
                         </a:cubicBezTo>
                         <a:cubicBezTo>
-                          <a:pt x="5454258" y="332298"/>
-                          <a:pt x="5438789" y="624240"/>
+                          <a:pt x="5433337" y="167541"/>
+                          <a:pt x="5401224" y="279298"/>
+                          <a:pt x="5427135" y="406861"/>
+                        </a:cubicBezTo>
+                        <a:cubicBezTo>
+                          <a:pt x="5453046" y="534424"/>
+                          <a:pt x="5424395" y="651648"/>
                           <a:pt x="5427135" y="782425"/>
                         </a:cubicBezTo>
                         <a:cubicBezTo>
-                          <a:pt x="3474628" y="734194"/>
-                          <a:pt x="729648" y="866880"/>
+                          <a:pt x="5302034" y="824283"/>
+                          <a:pt x="5125711" y="759397"/>
+                          <a:pt x="5047236" y="782425"/>
+                        </a:cubicBezTo>
+                        <a:cubicBezTo>
+                          <a:pt x="4968761" y="805453"/>
+                          <a:pt x="4748712" y="737313"/>
+                          <a:pt x="4667336" y="782425"/>
+                        </a:cubicBezTo>
+                        <a:cubicBezTo>
+                          <a:pt x="4585960" y="827537"/>
+                          <a:pt x="4246895" y="754794"/>
+                          <a:pt x="4070351" y="782425"/>
+                        </a:cubicBezTo>
+                        <a:cubicBezTo>
+                          <a:pt x="3893807" y="810056"/>
+                          <a:pt x="3859150" y="742666"/>
+                          <a:pt x="3690452" y="782425"/>
+                        </a:cubicBezTo>
+                        <a:cubicBezTo>
+                          <a:pt x="3521754" y="822184"/>
+                          <a:pt x="3332094" y="757168"/>
+                          <a:pt x="3147738" y="782425"/>
+                        </a:cubicBezTo>
+                        <a:cubicBezTo>
+                          <a:pt x="2963382" y="807682"/>
+                          <a:pt x="2870542" y="735299"/>
+                          <a:pt x="2713568" y="782425"/>
+                        </a:cubicBezTo>
+                        <a:cubicBezTo>
+                          <a:pt x="2556594" y="829551"/>
+                          <a:pt x="2361806" y="740166"/>
+                          <a:pt x="2170854" y="782425"/>
+                        </a:cubicBezTo>
+                        <a:cubicBezTo>
+                          <a:pt x="1979902" y="824684"/>
+                          <a:pt x="1744822" y="766596"/>
+                          <a:pt x="1628141" y="782425"/>
+                        </a:cubicBezTo>
+                        <a:cubicBezTo>
+                          <a:pt x="1511460" y="798254"/>
+                          <a:pt x="1194706" y="738360"/>
+                          <a:pt x="1085427" y="782425"/>
+                        </a:cubicBezTo>
+                        <a:cubicBezTo>
+                          <a:pt x="976148" y="826490"/>
+                          <a:pt x="673599" y="772698"/>
+                          <a:pt x="542714" y="782425"/>
+                        </a:cubicBezTo>
+                        <a:cubicBezTo>
+                          <a:pt x="411829" y="792152"/>
+                          <a:pt x="206150" y="767498"/>
                           <a:pt x="0" y="782425"/>
                         </a:cubicBezTo>
                         <a:cubicBezTo>
-                          <a:pt x="47936" y="499700"/>
-                          <a:pt x="34071" y="307652"/>
+                          <a:pt x="-12781" y="700819"/>
+                          <a:pt x="2351" y="536989"/>
+                          <a:pt x="0" y="383388"/>
+                        </a:cubicBezTo>
+                        <a:cubicBezTo>
+                          <a:pt x="-2351" y="229787"/>
+                          <a:pt x="28452" y="153163"/>
                           <a:pt x="0" y="0"/>
                         </a:cubicBezTo>
                         <a:close/>
@@ -4531,23 +5007,123 @@
                           <a:pt x="0" y="0"/>
                         </a:moveTo>
                         <a:cubicBezTo>
-                          <a:pt x="1628747" y="118645"/>
-                          <a:pt x="3230500" y="116012"/>
+                          <a:pt x="112729" y="-55038"/>
+                          <a:pt x="273155" y="38800"/>
+                          <a:pt x="488442" y="0"/>
+                        </a:cubicBezTo>
+                        <a:cubicBezTo>
+                          <a:pt x="703729" y="-38800"/>
+                          <a:pt x="780371" y="12401"/>
+                          <a:pt x="868342" y="0"/>
+                        </a:cubicBezTo>
+                        <a:cubicBezTo>
+                          <a:pt x="956313" y="-12401"/>
+                          <a:pt x="1319685" y="14993"/>
+                          <a:pt x="1519598" y="0"/>
+                        </a:cubicBezTo>
+                        <a:cubicBezTo>
+                          <a:pt x="1719511" y="-14993"/>
+                          <a:pt x="1857141" y="22240"/>
+                          <a:pt x="2008040" y="0"/>
+                        </a:cubicBezTo>
+                        <a:cubicBezTo>
+                          <a:pt x="2158939" y="-22240"/>
+                          <a:pt x="2290589" y="28389"/>
+                          <a:pt x="2496482" y="0"/>
+                        </a:cubicBezTo>
+                        <a:cubicBezTo>
+                          <a:pt x="2702375" y="-28389"/>
+                          <a:pt x="2985377" y="29220"/>
+                          <a:pt x="3147738" y="0"/>
+                        </a:cubicBezTo>
+                        <a:cubicBezTo>
+                          <a:pt x="3310099" y="-29220"/>
+                          <a:pt x="3398872" y="15855"/>
+                          <a:pt x="3581909" y="0"/>
+                        </a:cubicBezTo>
+                        <a:cubicBezTo>
+                          <a:pt x="3764946" y="-15855"/>
+                          <a:pt x="3937361" y="338"/>
+                          <a:pt x="4233165" y="0"/>
+                        </a:cubicBezTo>
+                        <a:cubicBezTo>
+                          <a:pt x="4528969" y="-338"/>
+                          <a:pt x="4623591" y="77264"/>
+                          <a:pt x="4884422" y="0"/>
+                        </a:cubicBezTo>
+                        <a:cubicBezTo>
+                          <a:pt x="5145253" y="-77264"/>
+                          <a:pt x="5288693" y="36391"/>
                           <a:pt x="5427135" y="0"/>
                         </a:cubicBezTo>
                         <a:cubicBezTo>
-                          <a:pt x="5471899" y="125859"/>
-                          <a:pt x="5452845" y="500339"/>
+                          <a:pt x="5451460" y="199444"/>
+                          <a:pt x="5424492" y="237659"/>
+                          <a:pt x="5427135" y="406861"/>
+                        </a:cubicBezTo>
+                        <a:cubicBezTo>
+                          <a:pt x="5429778" y="576063"/>
+                          <a:pt x="5395972" y="600886"/>
                           <a:pt x="5427135" y="782425"/>
                         </a:cubicBezTo>
                         <a:cubicBezTo>
-                          <a:pt x="4835298" y="917025"/>
-                          <a:pt x="799512" y="625229"/>
+                          <a:pt x="5327017" y="820502"/>
+                          <a:pt x="5233928" y="761930"/>
+                          <a:pt x="5047236" y="782425"/>
+                        </a:cubicBezTo>
+                        <a:cubicBezTo>
+                          <a:pt x="4860544" y="802920"/>
+                          <a:pt x="4566340" y="721235"/>
+                          <a:pt x="4395979" y="782425"/>
+                        </a:cubicBezTo>
+                        <a:cubicBezTo>
+                          <a:pt x="4225618" y="843615"/>
+                          <a:pt x="4106149" y="777324"/>
+                          <a:pt x="3961809" y="782425"/>
+                        </a:cubicBezTo>
+                        <a:cubicBezTo>
+                          <a:pt x="3817469" y="787526"/>
+                          <a:pt x="3550168" y="764291"/>
+                          <a:pt x="3419095" y="782425"/>
+                        </a:cubicBezTo>
+                        <a:cubicBezTo>
+                          <a:pt x="3288022" y="800559"/>
+                          <a:pt x="3063865" y="780870"/>
+                          <a:pt x="2767839" y="782425"/>
+                        </a:cubicBezTo>
+                        <a:cubicBezTo>
+                          <a:pt x="2471813" y="783980"/>
+                          <a:pt x="2477219" y="768629"/>
+                          <a:pt x="2225125" y="782425"/>
+                        </a:cubicBezTo>
+                        <a:cubicBezTo>
+                          <a:pt x="1973031" y="796221"/>
+                          <a:pt x="1958699" y="756270"/>
+                          <a:pt x="1845226" y="782425"/>
+                        </a:cubicBezTo>
+                        <a:cubicBezTo>
+                          <a:pt x="1731753" y="808580"/>
+                          <a:pt x="1535260" y="737916"/>
+                          <a:pt x="1411055" y="782425"/>
+                        </a:cubicBezTo>
+                        <a:cubicBezTo>
+                          <a:pt x="1286850" y="826934"/>
+                          <a:pt x="908588" y="704684"/>
+                          <a:pt x="759799" y="782425"/>
+                        </a:cubicBezTo>
+                        <a:cubicBezTo>
+                          <a:pt x="611010" y="860166"/>
+                          <a:pt x="263771" y="780884"/>
                           <a:pt x="0" y="782425"/>
                         </a:cubicBezTo>
                         <a:cubicBezTo>
-                          <a:pt x="56657" y="619159"/>
-                          <a:pt x="-39196" y="226081"/>
+                          <a:pt x="-14727" y="628373"/>
+                          <a:pt x="10095" y="547666"/>
+                          <a:pt x="0" y="406861"/>
+                        </a:cubicBezTo>
+                        <a:cubicBezTo>
+                          <a:pt x="-10095" y="266056"/>
+                          <a:pt x="20207" y="94030"/>
                           <a:pt x="0" y="0"/>
                         </a:cubicBezTo>
                         <a:close/>
@@ -4605,6 +5181,12 @@
           <a:prstGeom prst="rect">
             <a:avLst/>
           </a:prstGeom>
+          <a:ln w="12700" cap="sq">
+            <a:solidFill>
+              <a:schemeClr val="bg1"/>
+            </a:solidFill>
+            <a:miter lim="800000"/>
+          </a:ln>
         </p:spPr>
       </p:pic>
       <p:sp>
@@ -5050,7 +5632,7 @@
 </p:sld>
 </file>
 
-<file path=ppt/slides/slide4.xml><?xml version="1.0" encoding="utf-8"?>
+<file path=ppt/slides/slide5.xml><?xml version="1.0" encoding="utf-8"?>
 <p:sld xmlns:a="http://schemas.openxmlformats.org/drawingml/2006/main" xmlns:r="http://schemas.openxmlformats.org/officeDocument/2006/relationships" xmlns:p="http://schemas.openxmlformats.org/presentationml/2006/main" showMasterSp="0">
   <p:cSld>
     <p:spTree>
@@ -5164,7 +5746,13 @@
                 <a:solidFill>
                   <a:schemeClr val="bg1"/>
                 </a:solidFill>
-                <a:hlinkClick r:id="rId2" action="ppaction://hlinksldjump"/>
+                <a:hlinkClick r:id="rId2" action="ppaction://hlinksldjump">
+                  <a:extLst>
+                    <a:ext uri="{A12FA001-AC4F-418D-AE19-62706E023703}">
+                      <ahyp:hlinkClr xmlns:ahyp="http://schemas.microsoft.com/office/drawing/2018/hyperlinkcolor" val="tx"/>
+                    </a:ext>
+                  </a:extLst>
+                </a:hlinkClick>
               </a:rPr>
               <a:t>Írjunk be egy betűt </a:t>
             </a:r>
@@ -5264,6 +5852,12 @@
           <a:prstGeom prst="rect">
             <a:avLst/>
           </a:prstGeom>
+          <a:ln w="12700" cap="sq">
+            <a:solidFill>
+              <a:schemeClr val="bg1"/>
+            </a:solidFill>
+            <a:miter lim="800000"/>
+          </a:ln>
         </p:spPr>
       </p:pic>
     </p:spTree>
@@ -5565,7 +6159,7 @@
 </p:sld>
 </file>
 
-<file path=ppt/slides/slide5.xml><?xml version="1.0" encoding="utf-8"?>
+<file path=ppt/slides/slide6.xml><?xml version="1.0" encoding="utf-8"?>
 <p:sld xmlns:a="http://schemas.openxmlformats.org/drawingml/2006/main" xmlns:r="http://schemas.openxmlformats.org/officeDocument/2006/relationships" xmlns:p="http://schemas.openxmlformats.org/presentationml/2006/main" showMasterSp="0">
   <p:cSld>
     <p:spTree>
@@ -5733,6 +6327,12 @@
           <a:prstGeom prst="rect">
             <a:avLst/>
           </a:prstGeom>
+          <a:ln w="12700" cap="sq">
+            <a:solidFill>
+              <a:schemeClr val="bg1"/>
+            </a:solidFill>
+            <a:miter lim="800000"/>
+          </a:ln>
         </p:spPr>
       </p:pic>
     </p:spTree>
@@ -5940,7 +6540,7 @@
 </p:sld>
 </file>
 
-<file path=ppt/slides/slide6.xml><?xml version="1.0" encoding="utf-8"?>
+<file path=ppt/slides/slide7.xml><?xml version="1.0" encoding="utf-8"?>
 <p:sld xmlns:a="http://schemas.openxmlformats.org/drawingml/2006/main" xmlns:r="http://schemas.openxmlformats.org/officeDocument/2006/relationships" xmlns:p="http://schemas.openxmlformats.org/presentationml/2006/main" showMasterSp="0">
   <p:cSld>
     <p:spTree>
@@ -6131,6 +6731,12 @@
           <a:prstGeom prst="rect">
             <a:avLst/>
           </a:prstGeom>
+          <a:ln w="12700" cap="sq">
+            <a:solidFill>
+              <a:schemeClr val="bg1"/>
+            </a:solidFill>
+            <a:miter lim="800000"/>
+          </a:ln>
         </p:spPr>
       </p:pic>
       <p:pic>
@@ -6166,6 +6772,12 @@
           <a:prstGeom prst="rect">
             <a:avLst/>
           </a:prstGeom>
+          <a:ln w="12700" cap="sq">
+            <a:solidFill>
+              <a:schemeClr val="bg1"/>
+            </a:solidFill>
+            <a:miter lim="800000"/>
+          </a:ln>
         </p:spPr>
       </p:pic>
     </p:spTree>
@@ -6417,7 +7029,7 @@
 </p:sld>
 </file>
 
-<file path=ppt/slides/slide7.xml><?xml version="1.0" encoding="utf-8"?>
+<file path=ppt/slides/slide8.xml><?xml version="1.0" encoding="utf-8"?>
 <p:sld xmlns:a="http://schemas.openxmlformats.org/drawingml/2006/main" xmlns:r="http://schemas.openxmlformats.org/officeDocument/2006/relationships" xmlns:p="http://schemas.openxmlformats.org/presentationml/2006/main" showMasterSp="0">
   <p:cSld>
     <p:spTree>
@@ -6484,7 +7096,7 @@
         </p:nvSpPr>
         <p:spPr/>
         <p:txBody>
-          <a:bodyPr/>
+          <a:bodyPr anchor="t"/>
           <a:lstStyle/>
           <a:p>
             <a:endParaRPr lang="hu-HU" dirty="0">
@@ -6494,6 +7106,9 @@
             </a:endParaRPr>
           </a:p>
           <a:p>
+            <a:pPr marL="0" indent="0">
+              <a:buNone/>
+            </a:pPr>
             <a:endParaRPr lang="hu-HU" dirty="0">
               <a:solidFill>
                 <a:schemeClr val="bg1"/>
@@ -6507,7 +7122,7 @@
                   <a:schemeClr val="bg1"/>
                 </a:solidFill>
               </a:rPr>
-              <a:t>Amennyiben lenyomjuk az X betűt a program teljesen leáll.</a:t>
+              <a:t>Amennyiben lenyomjuk az X betűt a program teljesen leáll. Ezáltal visszakerülünk a terminálba.</a:t>
             </a:r>
           </a:p>
         </p:txBody>
@@ -6726,7 +7341,7 @@
 </p:sld>
 </file>
 
-<file path=ppt/slides/slide8.xml><?xml version="1.0" encoding="utf-8"?>
+<file path=ppt/slides/slide9.xml><?xml version="1.0" encoding="utf-8"?>
 <p:sld xmlns:a="http://schemas.openxmlformats.org/drawingml/2006/main" xmlns:r="http://schemas.openxmlformats.org/officeDocument/2006/relationships" xmlns:p="http://schemas.openxmlformats.org/presentationml/2006/main" showMasterSp="0">
   <p:cSld>
     <p:spTree>
@@ -7115,21 +7730,6 @@
 </file>
 
 <file path=customXml/item1.xml><?xml version="1.0" encoding="utf-8"?>
-<p:properties xmlns:p="http://schemas.microsoft.com/office/2006/metadata/properties" xmlns:xsi="http://www.w3.org/2001/XMLSchema-instance" xmlns:pc="http://schemas.microsoft.com/office/infopath/2007/PartnerControls">
-  <documentManagement/>
-</p:properties>
-</file>
-
-<file path=customXml/item2.xml><?xml version="1.0" encoding="utf-8"?>
-<?mso-contentType ?>
-<FormTemplates xmlns="http://schemas.microsoft.com/sharepoint/v3/contenttype/forms">
-  <Display>DocumentLibraryForm</Display>
-  <Edit>DocumentLibraryForm</Edit>
-  <New>DocumentLibraryForm</New>
-</FormTemplates>
-</file>
-
-<file path=customXml/item3.xml><?xml version="1.0" encoding="utf-8"?>
 <ct:contentTypeSchema xmlns:ct="http://schemas.microsoft.com/office/2006/metadata/contentType" xmlns:ma="http://schemas.microsoft.com/office/2006/metadata/properties/metaAttributes" ct:_="" ma:_="" ma:contentTypeName="Dokumentum" ma:contentTypeID="0x010100E5B8FE703E369947997187BFADE1AF83" ma:contentTypeVersion="1" ma:contentTypeDescription="Új dokumentum létrehozása." ma:contentTypeScope="" ma:versionID="f7f01756cbbb63b1cd4dbdca50430bfa">
   <xsd:schema xmlns:xsd="http://www.w3.org/2001/XMLSchema" xmlns:xs="http://www.w3.org/2001/XMLSchema" xmlns:p="http://schemas.microsoft.com/office/2006/metadata/properties" xmlns:ns3="794b48b7-b14e-471d-9d6a-d8c19bd5f0ba" targetNamespace="http://schemas.microsoft.com/office/2006/metadata/properties" ma:root="true" ma:fieldsID="bd2ec039ad7408eaa6c8ce9505317132" ns3:_="">
     <xsd:import namespace="794b48b7-b14e-471d-9d6a-d8c19bd5f0ba"/>
@@ -7255,24 +7855,22 @@
 </ct:contentTypeSchema>
 </file>
 
-<file path=customXml/itemProps1.xml><?xml version="1.0" encoding="utf-8"?>
-<ds:datastoreItem xmlns:ds="http://schemas.openxmlformats.org/officeDocument/2006/customXml" ds:itemID="{0F00AC4C-D4E4-4341-88F0-CF4532589865}">
-  <ds:schemaRefs>
-    <ds:schemaRef ds:uri="http://schemas.microsoft.com/office/2006/metadata/properties"/>
-    <ds:schemaRef ds:uri="http://schemas.microsoft.com/office/infopath/2007/PartnerControls"/>
-  </ds:schemaRefs>
-</ds:datastoreItem>
+<file path=customXml/item2.xml><?xml version="1.0" encoding="utf-8"?>
+<?mso-contentType ?>
+<FormTemplates xmlns="http://schemas.microsoft.com/sharepoint/v3/contenttype/forms">
+  <Display>DocumentLibraryForm</Display>
+  <Edit>DocumentLibraryForm</Edit>
+  <New>DocumentLibraryForm</New>
+</FormTemplates>
 </file>
 
-<file path=customXml/itemProps2.xml><?xml version="1.0" encoding="utf-8"?>
-<ds:datastoreItem xmlns:ds="http://schemas.openxmlformats.org/officeDocument/2006/customXml" ds:itemID="{0CAA3E4C-5FB1-4A85-A6B9-BE70DA4A5AFF}">
-  <ds:schemaRefs>
-    <ds:schemaRef ds:uri="http://schemas.microsoft.com/sharepoint/v3/contenttype/forms"/>
-  </ds:schemaRefs>
-</ds:datastoreItem>
+<file path=customXml/item3.xml><?xml version="1.0" encoding="utf-8"?>
+<p:properties xmlns:p="http://schemas.microsoft.com/office/2006/metadata/properties" xmlns:xsi="http://www.w3.org/2001/XMLSchema-instance" xmlns:pc="http://schemas.microsoft.com/office/infopath/2007/PartnerControls">
+  <documentManagement/>
+</p:properties>
 </file>
 
-<file path=customXml/itemProps3.xml><?xml version="1.0" encoding="utf-8"?>
+<file path=customXml/itemProps1.xml><?xml version="1.0" encoding="utf-8"?>
 <ds:datastoreItem xmlns:ds="http://schemas.openxmlformats.org/officeDocument/2006/customXml" ds:itemID="{B8177A3D-C342-42BE-BC93-7FB4CEE702D3}">
   <ds:schemaRefs>
     <ds:schemaRef ds:uri="http://schemas.microsoft.com/office/2006/metadata/contentType"/>
@@ -7288,4 +7886,21 @@
     <ds:schemaRef ds:uri="http://schemas.microsoft.com/internal/obd"/>
   </ds:schemaRefs>
 </ds:datastoreItem>
+</file>
+
+<file path=customXml/itemProps2.xml><?xml version="1.0" encoding="utf-8"?>
+<ds:datastoreItem xmlns:ds="http://schemas.openxmlformats.org/officeDocument/2006/customXml" ds:itemID="{0CAA3E4C-5FB1-4A85-A6B9-BE70DA4A5AFF}">
+  <ds:schemaRefs>
+    <ds:schemaRef ds:uri="http://schemas.microsoft.com/sharepoint/v3/contenttype/forms"/>
+  </ds:schemaRefs>
+</ds:datastoreItem>
+</file>
+
+<file path=customXml/itemProps3.xml><?xml version="1.0" encoding="utf-8"?>
+<ds:datastoreItem xmlns:ds="http://schemas.openxmlformats.org/officeDocument/2006/customXml" ds:itemID="{0F00AC4C-D4E4-4341-88F0-CF4532589865}">
+  <ds:schemaRefs>
+    <ds:schemaRef ds:uri="http://schemas.microsoft.com/office/2006/metadata/properties"/>
+    <ds:schemaRef ds:uri="http://schemas.microsoft.com/office/infopath/2007/PartnerControls"/>
+  </ds:schemaRefs>
+</ds:datastoreItem>
 </file>